--- a/examples/p18-synthetic-output-pack/synthetic-executive-briefing.pptx
+++ b/examples/p18-synthetic-output-pack/synthetic-executive-briefing.pptx
@@ -4223,7 +4223,7 @@
       </p:sp>
       <p:pic>
         <p:nvPicPr>
-          <p:cNvPr id="4" name="Picture 3" descr="Three-case synthetic comparison of gap beyond an assumed 75 SCU buffer: 0 SCU with no lag, 0 SCU with a one-period lag, 45 SCU with a two-period lag."/>
+          <p:cNvPr id="4" name="Picture 3" descr="Three-case synthetic comparison of the gap beyond an assumed 75 SCU buffer. 0-period lag: 0 SCU; 1-period lag: 0 SCU; 2-period lag: 45 SCU."/>
           <p:cNvPicPr>
             <a:picLocks noChangeAspect="1"/>
           </p:cNvPicPr>
